--- a/lecons/USA/Population Geography/USA_POP_L09_Population_Growth_and_its_Determinants.pptx
+++ b/lecons/USA/Population Geography/USA_POP_L09_Population_Growth_and_its_Determinants.pptx
@@ -6584,7 +6584,7 @@
                 <a:ea typeface="Times New Roman" pitchFamily="34" charset="-122"/>
                 <a:cs typeface="Times New Roman" pitchFamily="34" charset="-120"/>
               </a:rPr>
-              <a:t>Lesson 9: Population Growth and its Determinants</a:t>
+              <a:t>Lesson 9</a:t>
             </a:r>
             <a:endParaRPr lang="en-US" sz="2600" dirty="0"/>
           </a:p>
